--- a/public/videos/repositories/openclose-pulse/openclose-pulse-tech-preview.pptx
+++ b/public/videos/repositories/openclose-pulse/openclose-pulse-tech-preview.pptx
@@ -134,7 +134,7 @@
           <p:cNvPr id="2" name="タイトル 1">
             <a:extLst>
               <a:ext uri="{FF2B5EF4-FFF2-40B4-BE49-F238E27FC236}">
-                <a16:creationId xmlns:a16="http://schemas.microsoft.com/office/drawing/2014/main" id="{18033333-CCF0-BB5C-C6AA-0D185CD3CBB9}"/>
+                <a16:creationId xmlns:a16="http://schemas.microsoft.com/office/drawing/2014/main" id="{3975BAF5-DF80-77E7-62BC-1C505DA50723}"/>
               </a:ext>
             </a:extLst>
           </p:cNvPr>
@@ -171,7 +171,7 @@
           <p:cNvPr id="3" name="字幕 2">
             <a:extLst>
               <a:ext uri="{FF2B5EF4-FFF2-40B4-BE49-F238E27FC236}">
-                <a16:creationId xmlns:a16="http://schemas.microsoft.com/office/drawing/2014/main" id="{1DE92124-EAB9-3E60-5B1B-2974B892C706}"/>
+                <a16:creationId xmlns:a16="http://schemas.microsoft.com/office/drawing/2014/main" id="{6F297A20-9BFD-BE08-0754-856CB21C7137}"/>
               </a:ext>
             </a:extLst>
           </p:cNvPr>
@@ -241,7 +241,7 @@
           <p:cNvPr id="4" name="日付プレースホルダー 3">
             <a:extLst>
               <a:ext uri="{FF2B5EF4-FFF2-40B4-BE49-F238E27FC236}">
-                <a16:creationId xmlns:a16="http://schemas.microsoft.com/office/drawing/2014/main" id="{A2734642-E1E6-B8F1-E0CA-CD94D6080902}"/>
+                <a16:creationId xmlns:a16="http://schemas.microsoft.com/office/drawing/2014/main" id="{7272F863-76B1-B2CF-AD78-555848C767F8}"/>
               </a:ext>
             </a:extLst>
           </p:cNvPr>
@@ -257,7 +257,7 @@
           <a:bodyPr/>
           <a:lstStyle/>
           <a:p>
-            <a:fld id="{B5124346-8B62-4FCF-A34F-DEAF362E1609}" type="datetimeFigureOut">
+            <a:fld id="{F6064450-8ED7-4F17-8129-38C874F6AE64}" type="datetimeFigureOut">
               <a:rPr kumimoji="1" lang="ja-JP" altLang="en-US" smtClean="0"/>
               <a:t>2026/7/30</a:t>
             </a:fld>
@@ -270,7 +270,7 @@
           <p:cNvPr id="5" name="フッター プレースホルダー 4">
             <a:extLst>
               <a:ext uri="{FF2B5EF4-FFF2-40B4-BE49-F238E27FC236}">
-                <a16:creationId xmlns:a16="http://schemas.microsoft.com/office/drawing/2014/main" id="{3B177204-590A-832E-F161-89847D14C689}"/>
+                <a16:creationId xmlns:a16="http://schemas.microsoft.com/office/drawing/2014/main" id="{FABF1207-9B50-3EBD-0385-C3CE4F01F3A0}"/>
               </a:ext>
             </a:extLst>
           </p:cNvPr>
@@ -295,7 +295,7 @@
           <p:cNvPr id="6" name="スライド番号プレースホルダー 5">
             <a:extLst>
               <a:ext uri="{FF2B5EF4-FFF2-40B4-BE49-F238E27FC236}">
-                <a16:creationId xmlns:a16="http://schemas.microsoft.com/office/drawing/2014/main" id="{8F8BA8EB-3E33-C376-E400-8141BB9DAB92}"/>
+                <a16:creationId xmlns:a16="http://schemas.microsoft.com/office/drawing/2014/main" id="{8A5660BF-6066-80C5-A549-D1CAEF80D610}"/>
               </a:ext>
             </a:extLst>
           </p:cNvPr>
@@ -311,7 +311,7 @@
           <a:bodyPr/>
           <a:lstStyle/>
           <a:p>
-            <a:fld id="{52A4878C-693E-4BC8-B5E4-AF1C939D80BD}" type="slidenum">
+            <a:fld id="{26DB7A2E-B1F6-479F-A2FF-5E16E830F851}" type="slidenum">
               <a:rPr kumimoji="1" lang="ja-JP" altLang="en-US" smtClean="0"/>
               <a:t>‹#›</a:t>
             </a:fld>
@@ -322,7 +322,7 @@
     </p:spTree>
     <p:extLst>
       <p:ext uri="{BB962C8B-B14F-4D97-AF65-F5344CB8AC3E}">
-        <p14:creationId xmlns:p14="http://schemas.microsoft.com/office/powerpoint/2010/main" val="4127359743"/>
+        <p14:creationId xmlns:p14="http://schemas.microsoft.com/office/powerpoint/2010/main" val="2036936815"/>
       </p:ext>
     </p:extLst>
   </p:cSld>
@@ -354,7 +354,7 @@
           <p:cNvPr id="2" name="タイトル 1">
             <a:extLst>
               <a:ext uri="{FF2B5EF4-FFF2-40B4-BE49-F238E27FC236}">
-                <a16:creationId xmlns:a16="http://schemas.microsoft.com/office/drawing/2014/main" id="{FF48159A-FB91-B04E-AFD2-AC0EE6DFBF0A}"/>
+                <a16:creationId xmlns:a16="http://schemas.microsoft.com/office/drawing/2014/main" id="{7922680E-87AA-B273-3529-702D7ADEA383}"/>
               </a:ext>
             </a:extLst>
           </p:cNvPr>
@@ -382,7 +382,7 @@
           <p:cNvPr id="3" name="縦書きテキスト プレースホルダー 2">
             <a:extLst>
               <a:ext uri="{FF2B5EF4-FFF2-40B4-BE49-F238E27FC236}">
-                <a16:creationId xmlns:a16="http://schemas.microsoft.com/office/drawing/2014/main" id="{42311D1B-BECF-6FB0-14FF-4600CB0560FB}"/>
+                <a16:creationId xmlns:a16="http://schemas.microsoft.com/office/drawing/2014/main" id="{1577D0FE-9E3B-A60C-AF8C-AAF815B28E8B}"/>
               </a:ext>
             </a:extLst>
           </p:cNvPr>
@@ -471,7 +471,7 @@
           <p:cNvPr id="4" name="日付プレースホルダー 3">
             <a:extLst>
               <a:ext uri="{FF2B5EF4-FFF2-40B4-BE49-F238E27FC236}">
-                <a16:creationId xmlns:a16="http://schemas.microsoft.com/office/drawing/2014/main" id="{636FE67A-D8AE-F050-1FE8-6C10C2F48888}"/>
+                <a16:creationId xmlns:a16="http://schemas.microsoft.com/office/drawing/2014/main" id="{8107253D-E148-401E-4334-D695AF853EDA}"/>
               </a:ext>
             </a:extLst>
           </p:cNvPr>
@@ -487,7 +487,7 @@
           <a:bodyPr/>
           <a:lstStyle/>
           <a:p>
-            <a:fld id="{B5124346-8B62-4FCF-A34F-DEAF362E1609}" type="datetimeFigureOut">
+            <a:fld id="{F6064450-8ED7-4F17-8129-38C874F6AE64}" type="datetimeFigureOut">
               <a:rPr kumimoji="1" lang="ja-JP" altLang="en-US" smtClean="0"/>
               <a:t>2026/7/30</a:t>
             </a:fld>
@@ -500,7 +500,7 @@
           <p:cNvPr id="5" name="フッター プレースホルダー 4">
             <a:extLst>
               <a:ext uri="{FF2B5EF4-FFF2-40B4-BE49-F238E27FC236}">
-                <a16:creationId xmlns:a16="http://schemas.microsoft.com/office/drawing/2014/main" id="{60A7F45D-9F10-E2BD-A638-C8555B924E78}"/>
+                <a16:creationId xmlns:a16="http://schemas.microsoft.com/office/drawing/2014/main" id="{51993158-EA45-0D14-EA7D-DCE47EA44580}"/>
               </a:ext>
             </a:extLst>
           </p:cNvPr>
@@ -525,7 +525,7 @@
           <p:cNvPr id="6" name="スライド番号プレースホルダー 5">
             <a:extLst>
               <a:ext uri="{FF2B5EF4-FFF2-40B4-BE49-F238E27FC236}">
-                <a16:creationId xmlns:a16="http://schemas.microsoft.com/office/drawing/2014/main" id="{A940C8F2-8A76-0BB9-8BA6-7C440E812314}"/>
+                <a16:creationId xmlns:a16="http://schemas.microsoft.com/office/drawing/2014/main" id="{981107DA-6229-DBA4-FD99-A51C83FE1D7C}"/>
               </a:ext>
             </a:extLst>
           </p:cNvPr>
@@ -541,7 +541,7 @@
           <a:bodyPr/>
           <a:lstStyle/>
           <a:p>
-            <a:fld id="{52A4878C-693E-4BC8-B5E4-AF1C939D80BD}" type="slidenum">
+            <a:fld id="{26DB7A2E-B1F6-479F-A2FF-5E16E830F851}" type="slidenum">
               <a:rPr kumimoji="1" lang="ja-JP" altLang="en-US" smtClean="0"/>
               <a:t>‹#›</a:t>
             </a:fld>
@@ -552,7 +552,7 @@
     </p:spTree>
     <p:extLst>
       <p:ext uri="{BB962C8B-B14F-4D97-AF65-F5344CB8AC3E}">
-        <p14:creationId xmlns:p14="http://schemas.microsoft.com/office/powerpoint/2010/main" val="1425994122"/>
+        <p14:creationId xmlns:p14="http://schemas.microsoft.com/office/powerpoint/2010/main" val="4007851943"/>
       </p:ext>
     </p:extLst>
   </p:cSld>
@@ -584,7 +584,7 @@
           <p:cNvPr id="2" name="縦書きタイトル 1">
             <a:extLst>
               <a:ext uri="{FF2B5EF4-FFF2-40B4-BE49-F238E27FC236}">
-                <a16:creationId xmlns:a16="http://schemas.microsoft.com/office/drawing/2014/main" id="{8D9DCEF9-5CDE-A73B-7ECE-20B878C8A182}"/>
+                <a16:creationId xmlns:a16="http://schemas.microsoft.com/office/drawing/2014/main" id="{C4D711C9-B0EA-0ADF-7E16-81D84E8A1233}"/>
               </a:ext>
             </a:extLst>
           </p:cNvPr>
@@ -617,7 +617,7 @@
           <p:cNvPr id="3" name="縦書きテキスト プレースホルダー 2">
             <a:extLst>
               <a:ext uri="{FF2B5EF4-FFF2-40B4-BE49-F238E27FC236}">
-                <a16:creationId xmlns:a16="http://schemas.microsoft.com/office/drawing/2014/main" id="{D8738210-F33A-1577-DC99-A5D92A985275}"/>
+                <a16:creationId xmlns:a16="http://schemas.microsoft.com/office/drawing/2014/main" id="{9CBDDD9E-C591-B9D9-1FCB-C85A5D80EB86}"/>
               </a:ext>
             </a:extLst>
           </p:cNvPr>
@@ -711,7 +711,7 @@
           <p:cNvPr id="4" name="日付プレースホルダー 3">
             <a:extLst>
               <a:ext uri="{FF2B5EF4-FFF2-40B4-BE49-F238E27FC236}">
-                <a16:creationId xmlns:a16="http://schemas.microsoft.com/office/drawing/2014/main" id="{546C1EDE-A5FA-A5D1-8513-B55493B65134}"/>
+                <a16:creationId xmlns:a16="http://schemas.microsoft.com/office/drawing/2014/main" id="{B32852DD-4806-AC03-1CB5-032CF713F809}"/>
               </a:ext>
             </a:extLst>
           </p:cNvPr>
@@ -727,7 +727,7 @@
           <a:bodyPr/>
           <a:lstStyle/>
           <a:p>
-            <a:fld id="{B5124346-8B62-4FCF-A34F-DEAF362E1609}" type="datetimeFigureOut">
+            <a:fld id="{F6064450-8ED7-4F17-8129-38C874F6AE64}" type="datetimeFigureOut">
               <a:rPr kumimoji="1" lang="ja-JP" altLang="en-US" smtClean="0"/>
               <a:t>2026/7/30</a:t>
             </a:fld>
@@ -740,7 +740,7 @@
           <p:cNvPr id="5" name="フッター プレースホルダー 4">
             <a:extLst>
               <a:ext uri="{FF2B5EF4-FFF2-40B4-BE49-F238E27FC236}">
-                <a16:creationId xmlns:a16="http://schemas.microsoft.com/office/drawing/2014/main" id="{4F483D63-F792-6AF2-7B46-96347C6A8E16}"/>
+                <a16:creationId xmlns:a16="http://schemas.microsoft.com/office/drawing/2014/main" id="{3DCE474B-605B-7D50-E60E-F06B3D99275D}"/>
               </a:ext>
             </a:extLst>
           </p:cNvPr>
@@ -765,7 +765,7 @@
           <p:cNvPr id="6" name="スライド番号プレースホルダー 5">
             <a:extLst>
               <a:ext uri="{FF2B5EF4-FFF2-40B4-BE49-F238E27FC236}">
-                <a16:creationId xmlns:a16="http://schemas.microsoft.com/office/drawing/2014/main" id="{F6F00CA3-43EC-B7D3-9EBB-E3DF56440AAB}"/>
+                <a16:creationId xmlns:a16="http://schemas.microsoft.com/office/drawing/2014/main" id="{5CDFBE62-BE86-D4F6-4586-EE25965FB949}"/>
               </a:ext>
             </a:extLst>
           </p:cNvPr>
@@ -781,7 +781,7 @@
           <a:bodyPr/>
           <a:lstStyle/>
           <a:p>
-            <a:fld id="{52A4878C-693E-4BC8-B5E4-AF1C939D80BD}" type="slidenum">
+            <a:fld id="{26DB7A2E-B1F6-479F-A2FF-5E16E830F851}" type="slidenum">
               <a:rPr kumimoji="1" lang="ja-JP" altLang="en-US" smtClean="0"/>
               <a:t>‹#›</a:t>
             </a:fld>
@@ -792,7 +792,7 @@
     </p:spTree>
     <p:extLst>
       <p:ext uri="{BB962C8B-B14F-4D97-AF65-F5344CB8AC3E}">
-        <p14:creationId xmlns:p14="http://schemas.microsoft.com/office/powerpoint/2010/main" val="3055528258"/>
+        <p14:creationId xmlns:p14="http://schemas.microsoft.com/office/powerpoint/2010/main" val="3888747750"/>
       </p:ext>
     </p:extLst>
   </p:cSld>
@@ -824,7 +824,7 @@
           <p:cNvPr id="2" name="タイトル 1">
             <a:extLst>
               <a:ext uri="{FF2B5EF4-FFF2-40B4-BE49-F238E27FC236}">
-                <a16:creationId xmlns:a16="http://schemas.microsoft.com/office/drawing/2014/main" id="{D06554BD-FBBA-2867-2BD4-CF33DCBC09ED}"/>
+                <a16:creationId xmlns:a16="http://schemas.microsoft.com/office/drawing/2014/main" id="{7020776F-91AA-31A1-4148-3665E22D547A}"/>
               </a:ext>
             </a:extLst>
           </p:cNvPr>
@@ -852,7 +852,7 @@
           <p:cNvPr id="3" name="コンテンツ プレースホルダー 2">
             <a:extLst>
               <a:ext uri="{FF2B5EF4-FFF2-40B4-BE49-F238E27FC236}">
-                <a16:creationId xmlns:a16="http://schemas.microsoft.com/office/drawing/2014/main" id="{61BD0DDE-561B-6971-36F1-D092023B90D3}"/>
+                <a16:creationId xmlns:a16="http://schemas.microsoft.com/office/drawing/2014/main" id="{83C3DA38-B053-0C35-6286-AE672B6B4BA6}"/>
               </a:ext>
             </a:extLst>
           </p:cNvPr>
@@ -941,7 +941,7 @@
           <p:cNvPr id="4" name="日付プレースホルダー 3">
             <a:extLst>
               <a:ext uri="{FF2B5EF4-FFF2-40B4-BE49-F238E27FC236}">
-                <a16:creationId xmlns:a16="http://schemas.microsoft.com/office/drawing/2014/main" id="{748FE6D0-8018-BD3C-8AEE-33ACC67ABD80}"/>
+                <a16:creationId xmlns:a16="http://schemas.microsoft.com/office/drawing/2014/main" id="{7431269B-7616-792B-277F-70E93C024FFA}"/>
               </a:ext>
             </a:extLst>
           </p:cNvPr>
@@ -957,7 +957,7 @@
           <a:bodyPr/>
           <a:lstStyle/>
           <a:p>
-            <a:fld id="{B5124346-8B62-4FCF-A34F-DEAF362E1609}" type="datetimeFigureOut">
+            <a:fld id="{F6064450-8ED7-4F17-8129-38C874F6AE64}" type="datetimeFigureOut">
               <a:rPr kumimoji="1" lang="ja-JP" altLang="en-US" smtClean="0"/>
               <a:t>2026/7/30</a:t>
             </a:fld>
@@ -970,7 +970,7 @@
           <p:cNvPr id="5" name="フッター プレースホルダー 4">
             <a:extLst>
               <a:ext uri="{FF2B5EF4-FFF2-40B4-BE49-F238E27FC236}">
-                <a16:creationId xmlns:a16="http://schemas.microsoft.com/office/drawing/2014/main" id="{9446145E-E8D2-E556-050B-F6BA08530D16}"/>
+                <a16:creationId xmlns:a16="http://schemas.microsoft.com/office/drawing/2014/main" id="{357A0176-BFFD-4A86-BBCF-B0C816AA5F40}"/>
               </a:ext>
             </a:extLst>
           </p:cNvPr>
@@ -995,7 +995,7 @@
           <p:cNvPr id="6" name="スライド番号プレースホルダー 5">
             <a:extLst>
               <a:ext uri="{FF2B5EF4-FFF2-40B4-BE49-F238E27FC236}">
-                <a16:creationId xmlns:a16="http://schemas.microsoft.com/office/drawing/2014/main" id="{DA72372C-0A2E-4C8F-FB8B-4C39021447EE}"/>
+                <a16:creationId xmlns:a16="http://schemas.microsoft.com/office/drawing/2014/main" id="{CB1695C9-A2EE-80F7-B6ED-5C711FFA156D}"/>
               </a:ext>
             </a:extLst>
           </p:cNvPr>
@@ -1011,7 +1011,7 @@
           <a:bodyPr/>
           <a:lstStyle/>
           <a:p>
-            <a:fld id="{52A4878C-693E-4BC8-B5E4-AF1C939D80BD}" type="slidenum">
+            <a:fld id="{26DB7A2E-B1F6-479F-A2FF-5E16E830F851}" type="slidenum">
               <a:rPr kumimoji="1" lang="ja-JP" altLang="en-US" smtClean="0"/>
               <a:t>‹#›</a:t>
             </a:fld>
@@ -1022,7 +1022,7 @@
     </p:spTree>
     <p:extLst>
       <p:ext uri="{BB962C8B-B14F-4D97-AF65-F5344CB8AC3E}">
-        <p14:creationId xmlns:p14="http://schemas.microsoft.com/office/powerpoint/2010/main" val="2218050283"/>
+        <p14:creationId xmlns:p14="http://schemas.microsoft.com/office/powerpoint/2010/main" val="860235097"/>
       </p:ext>
     </p:extLst>
   </p:cSld>
@@ -1054,7 +1054,7 @@
           <p:cNvPr id="2" name="タイトル 1">
             <a:extLst>
               <a:ext uri="{FF2B5EF4-FFF2-40B4-BE49-F238E27FC236}">
-                <a16:creationId xmlns:a16="http://schemas.microsoft.com/office/drawing/2014/main" id="{B64C2158-0CAF-F91A-C50F-24289C533797}"/>
+                <a16:creationId xmlns:a16="http://schemas.microsoft.com/office/drawing/2014/main" id="{CB4574D6-C625-9AB9-87A6-688BEF40EC38}"/>
               </a:ext>
             </a:extLst>
           </p:cNvPr>
@@ -1091,7 +1091,7 @@
           <p:cNvPr id="3" name="テキスト プレースホルダー 2">
             <a:extLst>
               <a:ext uri="{FF2B5EF4-FFF2-40B4-BE49-F238E27FC236}">
-                <a16:creationId xmlns:a16="http://schemas.microsoft.com/office/drawing/2014/main" id="{CE5511A7-8704-0C16-E988-8B1A0BFF5ED2}"/>
+                <a16:creationId xmlns:a16="http://schemas.microsoft.com/office/drawing/2014/main" id="{25BA0337-8BCC-73DE-A98B-79C30F3B48FA}"/>
               </a:ext>
             </a:extLst>
           </p:cNvPr>
@@ -1216,7 +1216,7 @@
           <p:cNvPr id="4" name="日付プレースホルダー 3">
             <a:extLst>
               <a:ext uri="{FF2B5EF4-FFF2-40B4-BE49-F238E27FC236}">
-                <a16:creationId xmlns:a16="http://schemas.microsoft.com/office/drawing/2014/main" id="{A7B40E27-0CE8-18B8-EE8A-2B86914CB527}"/>
+                <a16:creationId xmlns:a16="http://schemas.microsoft.com/office/drawing/2014/main" id="{A7247085-DD4B-9721-A4BB-8DC22B5EDB34}"/>
               </a:ext>
             </a:extLst>
           </p:cNvPr>
@@ -1232,7 +1232,7 @@
           <a:bodyPr/>
           <a:lstStyle/>
           <a:p>
-            <a:fld id="{B5124346-8B62-4FCF-A34F-DEAF362E1609}" type="datetimeFigureOut">
+            <a:fld id="{F6064450-8ED7-4F17-8129-38C874F6AE64}" type="datetimeFigureOut">
               <a:rPr kumimoji="1" lang="ja-JP" altLang="en-US" smtClean="0"/>
               <a:t>2026/7/30</a:t>
             </a:fld>
@@ -1245,7 +1245,7 @@
           <p:cNvPr id="5" name="フッター プレースホルダー 4">
             <a:extLst>
               <a:ext uri="{FF2B5EF4-FFF2-40B4-BE49-F238E27FC236}">
-                <a16:creationId xmlns:a16="http://schemas.microsoft.com/office/drawing/2014/main" id="{69A77B14-B579-FEA5-C674-329E1D8B02A6}"/>
+                <a16:creationId xmlns:a16="http://schemas.microsoft.com/office/drawing/2014/main" id="{99F26F24-1E21-BF5E-A7E6-FC397F257CE5}"/>
               </a:ext>
             </a:extLst>
           </p:cNvPr>
@@ -1270,7 +1270,7 @@
           <p:cNvPr id="6" name="スライド番号プレースホルダー 5">
             <a:extLst>
               <a:ext uri="{FF2B5EF4-FFF2-40B4-BE49-F238E27FC236}">
-                <a16:creationId xmlns:a16="http://schemas.microsoft.com/office/drawing/2014/main" id="{B47CCE7E-95D2-F4B8-7AC3-367910BC5D1D}"/>
+                <a16:creationId xmlns:a16="http://schemas.microsoft.com/office/drawing/2014/main" id="{C9DDEC38-22C2-029E-7B9B-225CC9DD2656}"/>
               </a:ext>
             </a:extLst>
           </p:cNvPr>
@@ -1286,7 +1286,7 @@
           <a:bodyPr/>
           <a:lstStyle/>
           <a:p>
-            <a:fld id="{52A4878C-693E-4BC8-B5E4-AF1C939D80BD}" type="slidenum">
+            <a:fld id="{26DB7A2E-B1F6-479F-A2FF-5E16E830F851}" type="slidenum">
               <a:rPr kumimoji="1" lang="ja-JP" altLang="en-US" smtClean="0"/>
               <a:t>‹#›</a:t>
             </a:fld>
@@ -1297,7 +1297,7 @@
     </p:spTree>
     <p:extLst>
       <p:ext uri="{BB962C8B-B14F-4D97-AF65-F5344CB8AC3E}">
-        <p14:creationId xmlns:p14="http://schemas.microsoft.com/office/powerpoint/2010/main" val="3725893347"/>
+        <p14:creationId xmlns:p14="http://schemas.microsoft.com/office/powerpoint/2010/main" val="2838222"/>
       </p:ext>
     </p:extLst>
   </p:cSld>
@@ -1329,7 +1329,7 @@
           <p:cNvPr id="2" name="タイトル 1">
             <a:extLst>
               <a:ext uri="{FF2B5EF4-FFF2-40B4-BE49-F238E27FC236}">
-                <a16:creationId xmlns:a16="http://schemas.microsoft.com/office/drawing/2014/main" id="{BFB3233F-44E1-6055-608D-1DE0FE4F5FCD}"/>
+                <a16:creationId xmlns:a16="http://schemas.microsoft.com/office/drawing/2014/main" id="{7A90B64A-97EE-E44C-8357-E72637657554}"/>
               </a:ext>
             </a:extLst>
           </p:cNvPr>
@@ -1357,7 +1357,7 @@
           <p:cNvPr id="3" name="コンテンツ プレースホルダー 2">
             <a:extLst>
               <a:ext uri="{FF2B5EF4-FFF2-40B4-BE49-F238E27FC236}">
-                <a16:creationId xmlns:a16="http://schemas.microsoft.com/office/drawing/2014/main" id="{1F4EFD94-09A4-16E2-FCD3-C33DA2CD4492}"/>
+                <a16:creationId xmlns:a16="http://schemas.microsoft.com/office/drawing/2014/main" id="{A9D59216-80F9-56DA-D38E-10827D58301C}"/>
               </a:ext>
             </a:extLst>
           </p:cNvPr>
@@ -1451,7 +1451,7 @@
           <p:cNvPr id="4" name="コンテンツ プレースホルダー 3">
             <a:extLst>
               <a:ext uri="{FF2B5EF4-FFF2-40B4-BE49-F238E27FC236}">
-                <a16:creationId xmlns:a16="http://schemas.microsoft.com/office/drawing/2014/main" id="{155FE031-A756-4AFA-EA3B-42D36E38E3FD}"/>
+                <a16:creationId xmlns:a16="http://schemas.microsoft.com/office/drawing/2014/main" id="{EEA6315A-5914-059F-3ED6-E58F47D07F0C}"/>
               </a:ext>
             </a:extLst>
           </p:cNvPr>
@@ -1545,7 +1545,7 @@
           <p:cNvPr id="5" name="日付プレースホルダー 4">
             <a:extLst>
               <a:ext uri="{FF2B5EF4-FFF2-40B4-BE49-F238E27FC236}">
-                <a16:creationId xmlns:a16="http://schemas.microsoft.com/office/drawing/2014/main" id="{DD065B69-C719-907D-8BC9-5E4D8B27508B}"/>
+                <a16:creationId xmlns:a16="http://schemas.microsoft.com/office/drawing/2014/main" id="{87D62E79-3B8B-C3FC-C469-F054ECF27D1D}"/>
               </a:ext>
             </a:extLst>
           </p:cNvPr>
@@ -1561,7 +1561,7 @@
           <a:bodyPr/>
           <a:lstStyle/>
           <a:p>
-            <a:fld id="{B5124346-8B62-4FCF-A34F-DEAF362E1609}" type="datetimeFigureOut">
+            <a:fld id="{F6064450-8ED7-4F17-8129-38C874F6AE64}" type="datetimeFigureOut">
               <a:rPr kumimoji="1" lang="ja-JP" altLang="en-US" smtClean="0"/>
               <a:t>2026/7/30</a:t>
             </a:fld>
@@ -1574,7 +1574,7 @@
           <p:cNvPr id="6" name="フッター プレースホルダー 5">
             <a:extLst>
               <a:ext uri="{FF2B5EF4-FFF2-40B4-BE49-F238E27FC236}">
-                <a16:creationId xmlns:a16="http://schemas.microsoft.com/office/drawing/2014/main" id="{1E598DFC-28FA-FBC2-A364-4922D44304F7}"/>
+                <a16:creationId xmlns:a16="http://schemas.microsoft.com/office/drawing/2014/main" id="{542056DF-C244-7B82-ACAA-03AA057825B4}"/>
               </a:ext>
             </a:extLst>
           </p:cNvPr>
@@ -1599,7 +1599,7 @@
           <p:cNvPr id="7" name="スライド番号プレースホルダー 6">
             <a:extLst>
               <a:ext uri="{FF2B5EF4-FFF2-40B4-BE49-F238E27FC236}">
-                <a16:creationId xmlns:a16="http://schemas.microsoft.com/office/drawing/2014/main" id="{B4CDC423-E35C-ECC1-07E3-F0DCC1EA2F9E}"/>
+                <a16:creationId xmlns:a16="http://schemas.microsoft.com/office/drawing/2014/main" id="{4BB2FBBE-CBA1-1DF1-BEBA-07493C4CCA90}"/>
               </a:ext>
             </a:extLst>
           </p:cNvPr>
@@ -1615,7 +1615,7 @@
           <a:bodyPr/>
           <a:lstStyle/>
           <a:p>
-            <a:fld id="{52A4878C-693E-4BC8-B5E4-AF1C939D80BD}" type="slidenum">
+            <a:fld id="{26DB7A2E-B1F6-479F-A2FF-5E16E830F851}" type="slidenum">
               <a:rPr kumimoji="1" lang="ja-JP" altLang="en-US" smtClean="0"/>
               <a:t>‹#›</a:t>
             </a:fld>
@@ -1626,7 +1626,7 @@
     </p:spTree>
     <p:extLst>
       <p:ext uri="{BB962C8B-B14F-4D97-AF65-F5344CB8AC3E}">
-        <p14:creationId xmlns:p14="http://schemas.microsoft.com/office/powerpoint/2010/main" val="3272105184"/>
+        <p14:creationId xmlns:p14="http://schemas.microsoft.com/office/powerpoint/2010/main" val="19675317"/>
       </p:ext>
     </p:extLst>
   </p:cSld>
@@ -1658,7 +1658,7 @@
           <p:cNvPr id="2" name="タイトル 1">
             <a:extLst>
               <a:ext uri="{FF2B5EF4-FFF2-40B4-BE49-F238E27FC236}">
-                <a16:creationId xmlns:a16="http://schemas.microsoft.com/office/drawing/2014/main" id="{24F1EE2A-E987-A47A-6839-9E8C42EC5789}"/>
+                <a16:creationId xmlns:a16="http://schemas.microsoft.com/office/drawing/2014/main" id="{B32052EE-FD72-4BC2-BEF4-A187C0D8CF52}"/>
               </a:ext>
             </a:extLst>
           </p:cNvPr>
@@ -1691,7 +1691,7 @@
           <p:cNvPr id="3" name="テキスト プレースホルダー 2">
             <a:extLst>
               <a:ext uri="{FF2B5EF4-FFF2-40B4-BE49-F238E27FC236}">
-                <a16:creationId xmlns:a16="http://schemas.microsoft.com/office/drawing/2014/main" id="{CC090BC6-FB80-97C7-72FE-2C009556F999}"/>
+                <a16:creationId xmlns:a16="http://schemas.microsoft.com/office/drawing/2014/main" id="{D227DC81-60D0-CD5E-1C68-9A7146D0D365}"/>
               </a:ext>
             </a:extLst>
           </p:cNvPr>
@@ -1762,7 +1762,7 @@
           <p:cNvPr id="4" name="コンテンツ プレースホルダー 3">
             <a:extLst>
               <a:ext uri="{FF2B5EF4-FFF2-40B4-BE49-F238E27FC236}">
-                <a16:creationId xmlns:a16="http://schemas.microsoft.com/office/drawing/2014/main" id="{AA24BB96-794B-D6A4-021E-538F6D2926FE}"/>
+                <a16:creationId xmlns:a16="http://schemas.microsoft.com/office/drawing/2014/main" id="{AFDEE091-CA84-7063-2CD8-25CE92AA509B}"/>
               </a:ext>
             </a:extLst>
           </p:cNvPr>
@@ -1856,7 +1856,7 @@
           <p:cNvPr id="5" name="テキスト プレースホルダー 4">
             <a:extLst>
               <a:ext uri="{FF2B5EF4-FFF2-40B4-BE49-F238E27FC236}">
-                <a16:creationId xmlns:a16="http://schemas.microsoft.com/office/drawing/2014/main" id="{31D8C24D-509A-16BB-A336-834CF18BEED4}"/>
+                <a16:creationId xmlns:a16="http://schemas.microsoft.com/office/drawing/2014/main" id="{13945029-7D99-CCF4-9401-BAB659356D1A}"/>
               </a:ext>
             </a:extLst>
           </p:cNvPr>
@@ -1927,7 +1927,7 @@
           <p:cNvPr id="6" name="コンテンツ プレースホルダー 5">
             <a:extLst>
               <a:ext uri="{FF2B5EF4-FFF2-40B4-BE49-F238E27FC236}">
-                <a16:creationId xmlns:a16="http://schemas.microsoft.com/office/drawing/2014/main" id="{BCCD1C94-D553-E82C-6E31-1C1442C27E46}"/>
+                <a16:creationId xmlns:a16="http://schemas.microsoft.com/office/drawing/2014/main" id="{9F5D9665-C492-04E9-E65E-6B09997CFB67}"/>
               </a:ext>
             </a:extLst>
           </p:cNvPr>
@@ -2021,7 +2021,7 @@
           <p:cNvPr id="7" name="日付プレースホルダー 6">
             <a:extLst>
               <a:ext uri="{FF2B5EF4-FFF2-40B4-BE49-F238E27FC236}">
-                <a16:creationId xmlns:a16="http://schemas.microsoft.com/office/drawing/2014/main" id="{4D3874D3-0507-18C3-3475-1A488BAE79E0}"/>
+                <a16:creationId xmlns:a16="http://schemas.microsoft.com/office/drawing/2014/main" id="{9E053E7B-EE08-8EF5-EC80-CE4A9063B72E}"/>
               </a:ext>
             </a:extLst>
           </p:cNvPr>
@@ -2037,7 +2037,7 @@
           <a:bodyPr/>
           <a:lstStyle/>
           <a:p>
-            <a:fld id="{B5124346-8B62-4FCF-A34F-DEAF362E1609}" type="datetimeFigureOut">
+            <a:fld id="{F6064450-8ED7-4F17-8129-38C874F6AE64}" type="datetimeFigureOut">
               <a:rPr kumimoji="1" lang="ja-JP" altLang="en-US" smtClean="0"/>
               <a:t>2026/7/30</a:t>
             </a:fld>
@@ -2050,7 +2050,7 @@
           <p:cNvPr id="8" name="フッター プレースホルダー 7">
             <a:extLst>
               <a:ext uri="{FF2B5EF4-FFF2-40B4-BE49-F238E27FC236}">
-                <a16:creationId xmlns:a16="http://schemas.microsoft.com/office/drawing/2014/main" id="{2476AB94-79EC-431B-EBFC-7D63F65B1AE5}"/>
+                <a16:creationId xmlns:a16="http://schemas.microsoft.com/office/drawing/2014/main" id="{B0EF47AD-1389-AD18-7FAF-E771A2AA404C}"/>
               </a:ext>
             </a:extLst>
           </p:cNvPr>
@@ -2075,7 +2075,7 @@
           <p:cNvPr id="9" name="スライド番号プレースホルダー 8">
             <a:extLst>
               <a:ext uri="{FF2B5EF4-FFF2-40B4-BE49-F238E27FC236}">
-                <a16:creationId xmlns:a16="http://schemas.microsoft.com/office/drawing/2014/main" id="{E94ACD84-5457-A1D5-0EAC-D3EE3A50D02F}"/>
+                <a16:creationId xmlns:a16="http://schemas.microsoft.com/office/drawing/2014/main" id="{7720E6EF-6ACE-7A65-E5C3-9D44587912BE}"/>
               </a:ext>
             </a:extLst>
           </p:cNvPr>
@@ -2091,7 +2091,7 @@
           <a:bodyPr/>
           <a:lstStyle/>
           <a:p>
-            <a:fld id="{52A4878C-693E-4BC8-B5E4-AF1C939D80BD}" type="slidenum">
+            <a:fld id="{26DB7A2E-B1F6-479F-A2FF-5E16E830F851}" type="slidenum">
               <a:rPr kumimoji="1" lang="ja-JP" altLang="en-US" smtClean="0"/>
               <a:t>‹#›</a:t>
             </a:fld>
@@ -2102,7 +2102,7 @@
     </p:spTree>
     <p:extLst>
       <p:ext uri="{BB962C8B-B14F-4D97-AF65-F5344CB8AC3E}">
-        <p14:creationId xmlns:p14="http://schemas.microsoft.com/office/powerpoint/2010/main" val="3654438402"/>
+        <p14:creationId xmlns:p14="http://schemas.microsoft.com/office/powerpoint/2010/main" val="3230704021"/>
       </p:ext>
     </p:extLst>
   </p:cSld>
@@ -2134,7 +2134,7 @@
           <p:cNvPr id="2" name="タイトル 1">
             <a:extLst>
               <a:ext uri="{FF2B5EF4-FFF2-40B4-BE49-F238E27FC236}">
-                <a16:creationId xmlns:a16="http://schemas.microsoft.com/office/drawing/2014/main" id="{68827092-091D-21B4-2BA9-AF50246E572D}"/>
+                <a16:creationId xmlns:a16="http://schemas.microsoft.com/office/drawing/2014/main" id="{592D38AA-5ECD-0A1A-D264-0C42ABAD3997}"/>
               </a:ext>
             </a:extLst>
           </p:cNvPr>
@@ -2162,7 +2162,7 @@
           <p:cNvPr id="3" name="日付プレースホルダー 2">
             <a:extLst>
               <a:ext uri="{FF2B5EF4-FFF2-40B4-BE49-F238E27FC236}">
-                <a16:creationId xmlns:a16="http://schemas.microsoft.com/office/drawing/2014/main" id="{D9A76867-5C6C-4CFF-A193-8C0870595FDC}"/>
+                <a16:creationId xmlns:a16="http://schemas.microsoft.com/office/drawing/2014/main" id="{014261F9-CC3A-9C93-B5C7-56DCBFFB96B6}"/>
               </a:ext>
             </a:extLst>
           </p:cNvPr>
@@ -2178,7 +2178,7 @@
           <a:bodyPr/>
           <a:lstStyle/>
           <a:p>
-            <a:fld id="{B5124346-8B62-4FCF-A34F-DEAF362E1609}" type="datetimeFigureOut">
+            <a:fld id="{F6064450-8ED7-4F17-8129-38C874F6AE64}" type="datetimeFigureOut">
               <a:rPr kumimoji="1" lang="ja-JP" altLang="en-US" smtClean="0"/>
               <a:t>2026/7/30</a:t>
             </a:fld>
@@ -2191,7 +2191,7 @@
           <p:cNvPr id="4" name="フッター プレースホルダー 3">
             <a:extLst>
               <a:ext uri="{FF2B5EF4-FFF2-40B4-BE49-F238E27FC236}">
-                <a16:creationId xmlns:a16="http://schemas.microsoft.com/office/drawing/2014/main" id="{6655568E-AD2F-1DF3-DF26-58D9394AB161}"/>
+                <a16:creationId xmlns:a16="http://schemas.microsoft.com/office/drawing/2014/main" id="{CC9D60F5-5A07-F8FE-DFF6-3F4ECEA6C169}"/>
               </a:ext>
             </a:extLst>
           </p:cNvPr>
@@ -2216,7 +2216,7 @@
           <p:cNvPr id="5" name="スライド番号プレースホルダー 4">
             <a:extLst>
               <a:ext uri="{FF2B5EF4-FFF2-40B4-BE49-F238E27FC236}">
-                <a16:creationId xmlns:a16="http://schemas.microsoft.com/office/drawing/2014/main" id="{5AEB1F34-5422-770E-330E-572D862B4A41}"/>
+                <a16:creationId xmlns:a16="http://schemas.microsoft.com/office/drawing/2014/main" id="{B440E7B0-BE53-CBBA-B369-C391C44360E0}"/>
               </a:ext>
             </a:extLst>
           </p:cNvPr>
@@ -2232,7 +2232,7 @@
           <a:bodyPr/>
           <a:lstStyle/>
           <a:p>
-            <a:fld id="{52A4878C-693E-4BC8-B5E4-AF1C939D80BD}" type="slidenum">
+            <a:fld id="{26DB7A2E-B1F6-479F-A2FF-5E16E830F851}" type="slidenum">
               <a:rPr kumimoji="1" lang="ja-JP" altLang="en-US" smtClean="0"/>
               <a:t>‹#›</a:t>
             </a:fld>
@@ -2243,7 +2243,7 @@
     </p:spTree>
     <p:extLst>
       <p:ext uri="{BB962C8B-B14F-4D97-AF65-F5344CB8AC3E}">
-        <p14:creationId xmlns:p14="http://schemas.microsoft.com/office/powerpoint/2010/main" val="2885854261"/>
+        <p14:creationId xmlns:p14="http://schemas.microsoft.com/office/powerpoint/2010/main" val="527950515"/>
       </p:ext>
     </p:extLst>
   </p:cSld>
@@ -2275,7 +2275,7 @@
           <p:cNvPr id="2" name="日付プレースホルダー 1">
             <a:extLst>
               <a:ext uri="{FF2B5EF4-FFF2-40B4-BE49-F238E27FC236}">
-                <a16:creationId xmlns:a16="http://schemas.microsoft.com/office/drawing/2014/main" id="{F66C01F5-ABFD-A560-FD33-D98821BB2584}"/>
+                <a16:creationId xmlns:a16="http://schemas.microsoft.com/office/drawing/2014/main" id="{AE20B5BB-77AF-104F-7060-2E24256F18FE}"/>
               </a:ext>
             </a:extLst>
           </p:cNvPr>
@@ -2291,7 +2291,7 @@
           <a:bodyPr/>
           <a:lstStyle/>
           <a:p>
-            <a:fld id="{B5124346-8B62-4FCF-A34F-DEAF362E1609}" type="datetimeFigureOut">
+            <a:fld id="{F6064450-8ED7-4F17-8129-38C874F6AE64}" type="datetimeFigureOut">
               <a:rPr kumimoji="1" lang="ja-JP" altLang="en-US" smtClean="0"/>
               <a:t>2026/7/30</a:t>
             </a:fld>
@@ -2304,7 +2304,7 @@
           <p:cNvPr id="3" name="フッター プレースホルダー 2">
             <a:extLst>
               <a:ext uri="{FF2B5EF4-FFF2-40B4-BE49-F238E27FC236}">
-                <a16:creationId xmlns:a16="http://schemas.microsoft.com/office/drawing/2014/main" id="{7ED47739-172B-F210-56A6-7F03DC9BA0D5}"/>
+                <a16:creationId xmlns:a16="http://schemas.microsoft.com/office/drawing/2014/main" id="{6B170295-031F-2A2B-4EA7-BE17997FBF8C}"/>
               </a:ext>
             </a:extLst>
           </p:cNvPr>
@@ -2329,7 +2329,7 @@
           <p:cNvPr id="4" name="スライド番号プレースホルダー 3">
             <a:extLst>
               <a:ext uri="{FF2B5EF4-FFF2-40B4-BE49-F238E27FC236}">
-                <a16:creationId xmlns:a16="http://schemas.microsoft.com/office/drawing/2014/main" id="{6A1E1DCA-83C6-94AD-F26A-395421CF4EE4}"/>
+                <a16:creationId xmlns:a16="http://schemas.microsoft.com/office/drawing/2014/main" id="{9BAE4CC6-8364-8819-0B4A-C164706E1077}"/>
               </a:ext>
             </a:extLst>
           </p:cNvPr>
@@ -2345,7 +2345,7 @@
           <a:bodyPr/>
           <a:lstStyle/>
           <a:p>
-            <a:fld id="{52A4878C-693E-4BC8-B5E4-AF1C939D80BD}" type="slidenum">
+            <a:fld id="{26DB7A2E-B1F6-479F-A2FF-5E16E830F851}" type="slidenum">
               <a:rPr kumimoji="1" lang="ja-JP" altLang="en-US" smtClean="0"/>
               <a:t>‹#›</a:t>
             </a:fld>
@@ -2356,7 +2356,7 @@
     </p:spTree>
     <p:extLst>
       <p:ext uri="{BB962C8B-B14F-4D97-AF65-F5344CB8AC3E}">
-        <p14:creationId xmlns:p14="http://schemas.microsoft.com/office/powerpoint/2010/main" val="315888115"/>
+        <p14:creationId xmlns:p14="http://schemas.microsoft.com/office/powerpoint/2010/main" val="2826580481"/>
       </p:ext>
     </p:extLst>
   </p:cSld>
@@ -2388,7 +2388,7 @@
           <p:cNvPr id="2" name="タイトル 1">
             <a:extLst>
               <a:ext uri="{FF2B5EF4-FFF2-40B4-BE49-F238E27FC236}">
-                <a16:creationId xmlns:a16="http://schemas.microsoft.com/office/drawing/2014/main" id="{28E1B03F-9876-B01A-62E5-8A5BB8AAD153}"/>
+                <a16:creationId xmlns:a16="http://schemas.microsoft.com/office/drawing/2014/main" id="{E36AF0AE-D23E-87A1-1F73-34616FE1CBBE}"/>
               </a:ext>
             </a:extLst>
           </p:cNvPr>
@@ -2425,7 +2425,7 @@
           <p:cNvPr id="3" name="コンテンツ プレースホルダー 2">
             <a:extLst>
               <a:ext uri="{FF2B5EF4-FFF2-40B4-BE49-F238E27FC236}">
-                <a16:creationId xmlns:a16="http://schemas.microsoft.com/office/drawing/2014/main" id="{27A1A4D3-4339-B00F-94F8-DF2DAFD8049C}"/>
+                <a16:creationId xmlns:a16="http://schemas.microsoft.com/office/drawing/2014/main" id="{FCCE15D9-5336-29C8-C9FF-9F9A682CB173}"/>
               </a:ext>
             </a:extLst>
           </p:cNvPr>
@@ -2547,7 +2547,7 @@
           <p:cNvPr id="4" name="テキスト プレースホルダー 3">
             <a:extLst>
               <a:ext uri="{FF2B5EF4-FFF2-40B4-BE49-F238E27FC236}">
-                <a16:creationId xmlns:a16="http://schemas.microsoft.com/office/drawing/2014/main" id="{9D02ADD0-8EFB-26FB-F599-E2691A44C201}"/>
+                <a16:creationId xmlns:a16="http://schemas.microsoft.com/office/drawing/2014/main" id="{0C1E6B02-A0C1-DCCA-F4FA-47E23A9CBD4B}"/>
               </a:ext>
             </a:extLst>
           </p:cNvPr>
@@ -2618,7 +2618,7 @@
           <p:cNvPr id="5" name="日付プレースホルダー 4">
             <a:extLst>
               <a:ext uri="{FF2B5EF4-FFF2-40B4-BE49-F238E27FC236}">
-                <a16:creationId xmlns:a16="http://schemas.microsoft.com/office/drawing/2014/main" id="{6F1F6364-A263-9C42-EC8D-C0FBECC523B6}"/>
+                <a16:creationId xmlns:a16="http://schemas.microsoft.com/office/drawing/2014/main" id="{CFE960B6-3B28-D6E0-4757-E33D919C05CE}"/>
               </a:ext>
             </a:extLst>
           </p:cNvPr>
@@ -2634,7 +2634,7 @@
           <a:bodyPr/>
           <a:lstStyle/>
           <a:p>
-            <a:fld id="{B5124346-8B62-4FCF-A34F-DEAF362E1609}" type="datetimeFigureOut">
+            <a:fld id="{F6064450-8ED7-4F17-8129-38C874F6AE64}" type="datetimeFigureOut">
               <a:rPr kumimoji="1" lang="ja-JP" altLang="en-US" smtClean="0"/>
               <a:t>2026/7/30</a:t>
             </a:fld>
@@ -2647,7 +2647,7 @@
           <p:cNvPr id="6" name="フッター プレースホルダー 5">
             <a:extLst>
               <a:ext uri="{FF2B5EF4-FFF2-40B4-BE49-F238E27FC236}">
-                <a16:creationId xmlns:a16="http://schemas.microsoft.com/office/drawing/2014/main" id="{C9732BF0-35C1-440A-BCD4-6A01D289FD4F}"/>
+                <a16:creationId xmlns:a16="http://schemas.microsoft.com/office/drawing/2014/main" id="{3EC8D32C-F752-D95C-0D48-37E9B826A312}"/>
               </a:ext>
             </a:extLst>
           </p:cNvPr>
@@ -2672,7 +2672,7 @@
           <p:cNvPr id="7" name="スライド番号プレースホルダー 6">
             <a:extLst>
               <a:ext uri="{FF2B5EF4-FFF2-40B4-BE49-F238E27FC236}">
-                <a16:creationId xmlns:a16="http://schemas.microsoft.com/office/drawing/2014/main" id="{83ACA7D5-3F53-11EE-ECDC-0BED5F465546}"/>
+                <a16:creationId xmlns:a16="http://schemas.microsoft.com/office/drawing/2014/main" id="{9F6B6217-B2D6-954D-05F1-06494E21D062}"/>
               </a:ext>
             </a:extLst>
           </p:cNvPr>
@@ -2688,7 +2688,7 @@
           <a:bodyPr/>
           <a:lstStyle/>
           <a:p>
-            <a:fld id="{52A4878C-693E-4BC8-B5E4-AF1C939D80BD}" type="slidenum">
+            <a:fld id="{26DB7A2E-B1F6-479F-A2FF-5E16E830F851}" type="slidenum">
               <a:rPr kumimoji="1" lang="ja-JP" altLang="en-US" smtClean="0"/>
               <a:t>‹#›</a:t>
             </a:fld>
@@ -2699,7 +2699,7 @@
     </p:spTree>
     <p:extLst>
       <p:ext uri="{BB962C8B-B14F-4D97-AF65-F5344CB8AC3E}">
-        <p14:creationId xmlns:p14="http://schemas.microsoft.com/office/powerpoint/2010/main" val="3603287292"/>
+        <p14:creationId xmlns:p14="http://schemas.microsoft.com/office/powerpoint/2010/main" val="1852045116"/>
       </p:ext>
     </p:extLst>
   </p:cSld>
@@ -2731,7 +2731,7 @@
           <p:cNvPr id="2" name="タイトル 1">
             <a:extLst>
               <a:ext uri="{FF2B5EF4-FFF2-40B4-BE49-F238E27FC236}">
-                <a16:creationId xmlns:a16="http://schemas.microsoft.com/office/drawing/2014/main" id="{4612926E-8E06-D12A-580E-37DCCE4EAFCE}"/>
+                <a16:creationId xmlns:a16="http://schemas.microsoft.com/office/drawing/2014/main" id="{3CFF1A31-61C9-22FD-C164-BC30066437B5}"/>
               </a:ext>
             </a:extLst>
           </p:cNvPr>
@@ -2768,7 +2768,7 @@
           <p:cNvPr id="3" name="図プレースホルダー 2">
             <a:extLst>
               <a:ext uri="{FF2B5EF4-FFF2-40B4-BE49-F238E27FC236}">
-                <a16:creationId xmlns:a16="http://schemas.microsoft.com/office/drawing/2014/main" id="{22C69A35-E38D-37C8-A110-39380CE1D8C3}"/>
+                <a16:creationId xmlns:a16="http://schemas.microsoft.com/office/drawing/2014/main" id="{D70D9A19-8A13-65FD-8628-F71101D8EB78}"/>
               </a:ext>
             </a:extLst>
           </p:cNvPr>
@@ -2835,7 +2835,7 @@
           <p:cNvPr id="4" name="テキスト プレースホルダー 3">
             <a:extLst>
               <a:ext uri="{FF2B5EF4-FFF2-40B4-BE49-F238E27FC236}">
-                <a16:creationId xmlns:a16="http://schemas.microsoft.com/office/drawing/2014/main" id="{867003F3-7388-D6CD-F9F3-621515E1916B}"/>
+                <a16:creationId xmlns:a16="http://schemas.microsoft.com/office/drawing/2014/main" id="{7A402731-8B42-F771-9507-131668DC804D}"/>
               </a:ext>
             </a:extLst>
           </p:cNvPr>
@@ -2906,7 +2906,7 @@
           <p:cNvPr id="5" name="日付プレースホルダー 4">
             <a:extLst>
               <a:ext uri="{FF2B5EF4-FFF2-40B4-BE49-F238E27FC236}">
-                <a16:creationId xmlns:a16="http://schemas.microsoft.com/office/drawing/2014/main" id="{2A40BE19-1771-423C-18CD-9B3A0C88171C}"/>
+                <a16:creationId xmlns:a16="http://schemas.microsoft.com/office/drawing/2014/main" id="{5D1FC671-AC9F-F3DC-41F7-7857A4A26048}"/>
               </a:ext>
             </a:extLst>
           </p:cNvPr>
@@ -2922,7 +2922,7 @@
           <a:bodyPr/>
           <a:lstStyle/>
           <a:p>
-            <a:fld id="{B5124346-8B62-4FCF-A34F-DEAF362E1609}" type="datetimeFigureOut">
+            <a:fld id="{F6064450-8ED7-4F17-8129-38C874F6AE64}" type="datetimeFigureOut">
               <a:rPr kumimoji="1" lang="ja-JP" altLang="en-US" smtClean="0"/>
               <a:t>2026/7/30</a:t>
             </a:fld>
@@ -2935,7 +2935,7 @@
           <p:cNvPr id="6" name="フッター プレースホルダー 5">
             <a:extLst>
               <a:ext uri="{FF2B5EF4-FFF2-40B4-BE49-F238E27FC236}">
-                <a16:creationId xmlns:a16="http://schemas.microsoft.com/office/drawing/2014/main" id="{61E22B12-506C-E191-2F1F-576249990096}"/>
+                <a16:creationId xmlns:a16="http://schemas.microsoft.com/office/drawing/2014/main" id="{1BCD4F64-CD81-421F-E943-6A13555C41F1}"/>
               </a:ext>
             </a:extLst>
           </p:cNvPr>
@@ -2960,7 +2960,7 @@
           <p:cNvPr id="7" name="スライド番号プレースホルダー 6">
             <a:extLst>
               <a:ext uri="{FF2B5EF4-FFF2-40B4-BE49-F238E27FC236}">
-                <a16:creationId xmlns:a16="http://schemas.microsoft.com/office/drawing/2014/main" id="{69E5B7F9-00FA-69E8-299B-62F469FF180F}"/>
+                <a16:creationId xmlns:a16="http://schemas.microsoft.com/office/drawing/2014/main" id="{3E4F6CDA-8B55-9518-3C9F-BAA3FF7A3FFA}"/>
               </a:ext>
             </a:extLst>
           </p:cNvPr>
@@ -2976,7 +2976,7 @@
           <a:bodyPr/>
           <a:lstStyle/>
           <a:p>
-            <a:fld id="{52A4878C-693E-4BC8-B5E4-AF1C939D80BD}" type="slidenum">
+            <a:fld id="{26DB7A2E-B1F6-479F-A2FF-5E16E830F851}" type="slidenum">
               <a:rPr kumimoji="1" lang="ja-JP" altLang="en-US" smtClean="0"/>
               <a:t>‹#›</a:t>
             </a:fld>
@@ -2987,7 +2987,7 @@
     </p:spTree>
     <p:extLst>
       <p:ext uri="{BB962C8B-B14F-4D97-AF65-F5344CB8AC3E}">
-        <p14:creationId xmlns:p14="http://schemas.microsoft.com/office/powerpoint/2010/main" val="2069905021"/>
+        <p14:creationId xmlns:p14="http://schemas.microsoft.com/office/powerpoint/2010/main" val="278547819"/>
       </p:ext>
     </p:extLst>
   </p:cSld>
@@ -3024,7 +3024,7 @@
           <p:cNvPr id="2" name="タイトル プレースホルダー 1">
             <a:extLst>
               <a:ext uri="{FF2B5EF4-FFF2-40B4-BE49-F238E27FC236}">
-                <a16:creationId xmlns:a16="http://schemas.microsoft.com/office/drawing/2014/main" id="{2409BE2F-1756-155C-2459-CD1E9D5A715D}"/>
+                <a16:creationId xmlns:a16="http://schemas.microsoft.com/office/drawing/2014/main" id="{FEDC3B0D-7217-C9F1-E289-C7889BF9296A}"/>
               </a:ext>
             </a:extLst>
           </p:cNvPr>
@@ -3062,7 +3062,7 @@
           <p:cNvPr id="3" name="テキスト プレースホルダー 2">
             <a:extLst>
               <a:ext uri="{FF2B5EF4-FFF2-40B4-BE49-F238E27FC236}">
-                <a16:creationId xmlns:a16="http://schemas.microsoft.com/office/drawing/2014/main" id="{CE446117-EE6D-651B-1B5A-557EB7EAB46C}"/>
+                <a16:creationId xmlns:a16="http://schemas.microsoft.com/office/drawing/2014/main" id="{54F78E6C-9343-244A-8FC1-B25606912F36}"/>
               </a:ext>
             </a:extLst>
           </p:cNvPr>
@@ -3161,7 +3161,7 @@
           <p:cNvPr id="4" name="日付プレースホルダー 3">
             <a:extLst>
               <a:ext uri="{FF2B5EF4-FFF2-40B4-BE49-F238E27FC236}">
-                <a16:creationId xmlns:a16="http://schemas.microsoft.com/office/drawing/2014/main" id="{F75679A7-D72C-0032-4B59-01B6CBEC6FF4}"/>
+                <a16:creationId xmlns:a16="http://schemas.microsoft.com/office/drawing/2014/main" id="{827FF241-BD3A-8524-6EE2-C70AF5460A8F}"/>
               </a:ext>
             </a:extLst>
           </p:cNvPr>
@@ -3195,7 +3195,7 @@
             </a:lvl1pPr>
           </a:lstStyle>
           <a:p>
-            <a:fld id="{B5124346-8B62-4FCF-A34F-DEAF362E1609}" type="datetimeFigureOut">
+            <a:fld id="{F6064450-8ED7-4F17-8129-38C874F6AE64}" type="datetimeFigureOut">
               <a:rPr kumimoji="1" lang="ja-JP" altLang="en-US" smtClean="0"/>
               <a:t>2026/7/30</a:t>
             </a:fld>
@@ -3208,7 +3208,7 @@
           <p:cNvPr id="5" name="フッター プレースホルダー 4">
             <a:extLst>
               <a:ext uri="{FF2B5EF4-FFF2-40B4-BE49-F238E27FC236}">
-                <a16:creationId xmlns:a16="http://schemas.microsoft.com/office/drawing/2014/main" id="{E58D2735-E276-B73E-811B-58C43EEC5E79}"/>
+                <a16:creationId xmlns:a16="http://schemas.microsoft.com/office/drawing/2014/main" id="{15B2E829-0575-6C83-0FA3-F63502BF344A}"/>
               </a:ext>
             </a:extLst>
           </p:cNvPr>
@@ -3251,7 +3251,7 @@
           <p:cNvPr id="6" name="スライド番号プレースホルダー 5">
             <a:extLst>
               <a:ext uri="{FF2B5EF4-FFF2-40B4-BE49-F238E27FC236}">
-                <a16:creationId xmlns:a16="http://schemas.microsoft.com/office/drawing/2014/main" id="{B3B846FF-F33B-13AC-7E1D-36D33DF8EE99}"/>
+                <a16:creationId xmlns:a16="http://schemas.microsoft.com/office/drawing/2014/main" id="{5EF5A21D-BA17-2D0C-3A1B-62C36C35AE31}"/>
               </a:ext>
             </a:extLst>
           </p:cNvPr>
@@ -3285,7 +3285,7 @@
             </a:lvl1pPr>
           </a:lstStyle>
           <a:p>
-            <a:fld id="{52A4878C-693E-4BC8-B5E4-AF1C939D80BD}" type="slidenum">
+            <a:fld id="{26DB7A2E-B1F6-479F-A2FF-5E16E830F851}" type="slidenum">
               <a:rPr kumimoji="1" lang="ja-JP" altLang="en-US" smtClean="0"/>
               <a:t>‹#›</a:t>
             </a:fld>
@@ -3296,7 +3296,7 @@
     </p:spTree>
     <p:extLst>
       <p:ext uri="{BB962C8B-B14F-4D97-AF65-F5344CB8AC3E}">
-        <p14:creationId xmlns:p14="http://schemas.microsoft.com/office/powerpoint/2010/main" val="3959393439"/>
+        <p14:creationId xmlns:p14="http://schemas.microsoft.com/office/powerpoint/2010/main" val="875752283"/>
       </p:ext>
     </p:extLst>
   </p:cSld>
@@ -3619,7 +3619,7 @@
           <p:cNvPr id="2" name="テキスト ボックス 1">
             <a:extLst>
               <a:ext uri="{FF2B5EF4-FFF2-40B4-BE49-F238E27FC236}">
-                <a16:creationId xmlns:a16="http://schemas.microsoft.com/office/drawing/2014/main" id="{A2E408EA-0E0F-8151-B19E-64375DAC3016}"/>
+                <a16:creationId xmlns:a16="http://schemas.microsoft.com/office/drawing/2014/main" id="{2107E464-98CA-73DB-D7EF-7E8988178A99}"/>
               </a:ext>
             </a:extLst>
           </p:cNvPr>
@@ -3665,7 +3665,7 @@
           <p:cNvPr id="3" name="テキスト ボックス 2">
             <a:extLst>
               <a:ext uri="{FF2B5EF4-FFF2-40B4-BE49-F238E27FC236}">
-                <a16:creationId xmlns:a16="http://schemas.microsoft.com/office/drawing/2014/main" id="{261F5AC2-A50A-0686-DDFF-EC155850B598}"/>
+                <a16:creationId xmlns:a16="http://schemas.microsoft.com/office/drawing/2014/main" id="{C293B270-8823-53D7-BEC3-939106E5420D}"/>
               </a:ext>
             </a:extLst>
           </p:cNvPr>
@@ -3714,7 +3714,7 @@
           <p:cNvPr id="4" name="テキスト ボックス 3">
             <a:extLst>
               <a:ext uri="{FF2B5EF4-FFF2-40B4-BE49-F238E27FC236}">
-                <a16:creationId xmlns:a16="http://schemas.microsoft.com/office/drawing/2014/main" id="{E5A4060C-DACB-0700-EFA9-C04A9BF51971}"/>
+                <a16:creationId xmlns:a16="http://schemas.microsoft.com/office/drawing/2014/main" id="{875BC34D-CB33-38D9-C4FF-821BB7C06CEF}"/>
               </a:ext>
             </a:extLst>
           </p:cNvPr>
@@ -3754,7 +3754,7 @@
           <p:cNvPr id="5" name="テキスト ボックス 4">
             <a:extLst>
               <a:ext uri="{FF2B5EF4-FFF2-40B4-BE49-F238E27FC236}">
-                <a16:creationId xmlns:a16="http://schemas.microsoft.com/office/drawing/2014/main" id="{56D4872F-7A89-FBE0-B53E-A640DD750A18}"/>
+                <a16:creationId xmlns:a16="http://schemas.microsoft.com/office/drawing/2014/main" id="{24B09B07-0D2A-178D-D0F9-9F435D639816}"/>
               </a:ext>
             </a:extLst>
           </p:cNvPr>
@@ -3801,7 +3801,7 @@
             <a:hlinkClick r:id="" action="ppaction://media"/>
             <a:extLst>
               <a:ext uri="{FF2B5EF4-FFF2-40B4-BE49-F238E27FC236}">
-                <a16:creationId xmlns:a16="http://schemas.microsoft.com/office/drawing/2014/main" id="{FBBB2458-FDAA-CB34-80FA-D46DB5FBF4FD}"/>
+                <a16:creationId xmlns:a16="http://schemas.microsoft.com/office/drawing/2014/main" id="{05E73B4A-6E91-C3FE-C470-A0C781615208}"/>
               </a:ext>
             </a:extLst>
           </p:cNvPr>
@@ -3836,7 +3836,7 @@
     </p:spTree>
     <p:extLst>
       <p:ext uri="{BB962C8B-B14F-4D97-AF65-F5344CB8AC3E}">
-        <p14:creationId xmlns:p14="http://schemas.microsoft.com/office/powerpoint/2010/main" val="4041506040"/>
+        <p14:creationId xmlns:p14="http://schemas.microsoft.com/office/powerpoint/2010/main" val="1363415303"/>
       </p:ext>
     </p:extLst>
   </p:cSld>
@@ -3960,7 +3960,7 @@
           <p:cNvPr id="2" name="テキスト ボックス 1">
             <a:extLst>
               <a:ext uri="{FF2B5EF4-FFF2-40B4-BE49-F238E27FC236}">
-                <a16:creationId xmlns:a16="http://schemas.microsoft.com/office/drawing/2014/main" id="{EA533C40-545F-43B0-8647-13210FBBE817}"/>
+                <a16:creationId xmlns:a16="http://schemas.microsoft.com/office/drawing/2014/main" id="{A11D6C6C-EE2A-6529-90ED-C90EFB5F0406}"/>
               </a:ext>
             </a:extLst>
           </p:cNvPr>
@@ -4006,7 +4006,7 @@
           <p:cNvPr id="3" name="テキスト ボックス 2">
             <a:extLst>
               <a:ext uri="{FF2B5EF4-FFF2-40B4-BE49-F238E27FC236}">
-                <a16:creationId xmlns:a16="http://schemas.microsoft.com/office/drawing/2014/main" id="{B289CC18-BD82-2B4A-ED03-D7EB9539EE16}"/>
+                <a16:creationId xmlns:a16="http://schemas.microsoft.com/office/drawing/2014/main" id="{BEAC8199-9093-C127-6378-746B549D4008}"/>
               </a:ext>
             </a:extLst>
           </p:cNvPr>
@@ -4046,7 +4046,7 @@
           <p:cNvPr id="4" name="テキスト ボックス 3">
             <a:extLst>
               <a:ext uri="{FF2B5EF4-FFF2-40B4-BE49-F238E27FC236}">
-                <a16:creationId xmlns:a16="http://schemas.microsoft.com/office/drawing/2014/main" id="{9C84C003-F779-C3CD-23B3-BC4B1E7D3C22}"/>
+                <a16:creationId xmlns:a16="http://schemas.microsoft.com/office/drawing/2014/main" id="{BEFC74C7-5189-0DA9-D2CF-2A830573896D}"/>
               </a:ext>
             </a:extLst>
           </p:cNvPr>
@@ -4110,7 +4110,7 @@
           <p:cNvPr id="5" name="テキスト ボックス 4">
             <a:extLst>
               <a:ext uri="{FF2B5EF4-FFF2-40B4-BE49-F238E27FC236}">
-                <a16:creationId xmlns:a16="http://schemas.microsoft.com/office/drawing/2014/main" id="{0771D881-5BEF-669C-B11F-1125364C3AC8}"/>
+                <a16:creationId xmlns:a16="http://schemas.microsoft.com/office/drawing/2014/main" id="{3BBBEC4C-9AAB-BDB0-2B1B-B8E2B42021F7}"/>
               </a:ext>
             </a:extLst>
           </p:cNvPr>
@@ -4157,7 +4157,7 @@
             <a:hlinkClick r:id="" action="ppaction://media"/>
             <a:extLst>
               <a:ext uri="{FF2B5EF4-FFF2-40B4-BE49-F238E27FC236}">
-                <a16:creationId xmlns:a16="http://schemas.microsoft.com/office/drawing/2014/main" id="{FDB8B29F-A7C4-D477-EDA9-75EF2FE92268}"/>
+                <a16:creationId xmlns:a16="http://schemas.microsoft.com/office/drawing/2014/main" id="{6F6E8FD5-FE73-2F34-BC37-30BC4DDEDFDD}"/>
               </a:ext>
             </a:extLst>
           </p:cNvPr>
@@ -4192,7 +4192,7 @@
     </p:spTree>
     <p:extLst>
       <p:ext uri="{BB962C8B-B14F-4D97-AF65-F5344CB8AC3E}">
-        <p14:creationId xmlns:p14="http://schemas.microsoft.com/office/powerpoint/2010/main" val="1061682601"/>
+        <p14:creationId xmlns:p14="http://schemas.microsoft.com/office/powerpoint/2010/main" val="662638420"/>
       </p:ext>
     </p:extLst>
   </p:cSld>
@@ -4316,7 +4316,7 @@
           <p:cNvPr id="2" name="テキスト ボックス 1">
             <a:extLst>
               <a:ext uri="{FF2B5EF4-FFF2-40B4-BE49-F238E27FC236}">
-                <a16:creationId xmlns:a16="http://schemas.microsoft.com/office/drawing/2014/main" id="{EC1C214F-5793-6265-C7A2-8191DDD9F276}"/>
+                <a16:creationId xmlns:a16="http://schemas.microsoft.com/office/drawing/2014/main" id="{F29C2D74-3187-D816-60BC-DA2FA0E429F9}"/>
               </a:ext>
             </a:extLst>
           </p:cNvPr>
@@ -4362,7 +4362,7 @@
           <p:cNvPr id="3" name="テキスト ボックス 2">
             <a:extLst>
               <a:ext uri="{FF2B5EF4-FFF2-40B4-BE49-F238E27FC236}">
-                <a16:creationId xmlns:a16="http://schemas.microsoft.com/office/drawing/2014/main" id="{31B2CD28-FC4C-3F49-D588-1C6EE05A44DF}"/>
+                <a16:creationId xmlns:a16="http://schemas.microsoft.com/office/drawing/2014/main" id="{D661304F-5B09-EAD8-FADB-1A57F007843C}"/>
               </a:ext>
             </a:extLst>
           </p:cNvPr>
@@ -4402,7 +4402,7 @@
           <p:cNvPr id="4" name="テキスト ボックス 3">
             <a:extLst>
               <a:ext uri="{FF2B5EF4-FFF2-40B4-BE49-F238E27FC236}">
-                <a16:creationId xmlns:a16="http://schemas.microsoft.com/office/drawing/2014/main" id="{B354D622-B8AA-BB31-0FB9-C9F90BBC603D}"/>
+                <a16:creationId xmlns:a16="http://schemas.microsoft.com/office/drawing/2014/main" id="{A0D39D26-8B9D-E7B4-6275-7BA9CA567AA4}"/>
               </a:ext>
             </a:extLst>
           </p:cNvPr>
@@ -4497,7 +4497,7 @@
           <p:cNvPr id="5" name="テキスト ボックス 4">
             <a:extLst>
               <a:ext uri="{FF2B5EF4-FFF2-40B4-BE49-F238E27FC236}">
-                <a16:creationId xmlns:a16="http://schemas.microsoft.com/office/drawing/2014/main" id="{7D61DF74-FA0F-90C8-7B26-417FFE683BAC}"/>
+                <a16:creationId xmlns:a16="http://schemas.microsoft.com/office/drawing/2014/main" id="{31F94A75-A1DF-E80E-C371-F73EBFE592A3}"/>
               </a:ext>
             </a:extLst>
           </p:cNvPr>
@@ -4544,7 +4544,7 @@
             <a:hlinkClick r:id="" action="ppaction://media"/>
             <a:extLst>
               <a:ext uri="{FF2B5EF4-FFF2-40B4-BE49-F238E27FC236}">
-                <a16:creationId xmlns:a16="http://schemas.microsoft.com/office/drawing/2014/main" id="{070F5CB0-ADAA-0265-155B-F6F701D11ED2}"/>
+                <a16:creationId xmlns:a16="http://schemas.microsoft.com/office/drawing/2014/main" id="{0AF4F79D-72BB-105A-D5EC-EF4C8C7B1345}"/>
               </a:ext>
             </a:extLst>
           </p:cNvPr>
@@ -4579,7 +4579,7 @@
     </p:spTree>
     <p:extLst>
       <p:ext uri="{BB962C8B-B14F-4D97-AF65-F5344CB8AC3E}">
-        <p14:creationId xmlns:p14="http://schemas.microsoft.com/office/powerpoint/2010/main" val="2661111976"/>
+        <p14:creationId xmlns:p14="http://schemas.microsoft.com/office/powerpoint/2010/main" val="748982302"/>
       </p:ext>
     </p:extLst>
   </p:cSld>
@@ -4703,7 +4703,7 @@
           <p:cNvPr id="2" name="テキスト ボックス 1">
             <a:extLst>
               <a:ext uri="{FF2B5EF4-FFF2-40B4-BE49-F238E27FC236}">
-                <a16:creationId xmlns:a16="http://schemas.microsoft.com/office/drawing/2014/main" id="{896348E8-D094-620A-A5E9-ECC6EAB0FE29}"/>
+                <a16:creationId xmlns:a16="http://schemas.microsoft.com/office/drawing/2014/main" id="{478DD448-D8D5-F49D-45EE-17A327D57E1E}"/>
               </a:ext>
             </a:extLst>
           </p:cNvPr>
@@ -4749,7 +4749,7 @@
           <p:cNvPr id="3" name="テキスト ボックス 2">
             <a:extLst>
               <a:ext uri="{FF2B5EF4-FFF2-40B4-BE49-F238E27FC236}">
-                <a16:creationId xmlns:a16="http://schemas.microsoft.com/office/drawing/2014/main" id="{7AE60B2C-FADD-734C-4F92-44957A25BBC9}"/>
+                <a16:creationId xmlns:a16="http://schemas.microsoft.com/office/drawing/2014/main" id="{FD4F44D4-74EA-4819-C67D-FEC52D19F920}"/>
               </a:ext>
             </a:extLst>
           </p:cNvPr>
@@ -4789,7 +4789,7 @@
           <p:cNvPr id="4" name="テキスト ボックス 3">
             <a:extLst>
               <a:ext uri="{FF2B5EF4-FFF2-40B4-BE49-F238E27FC236}">
-                <a16:creationId xmlns:a16="http://schemas.microsoft.com/office/drawing/2014/main" id="{E2426B5D-C719-4CCA-A3E0-39139AC2D44B}"/>
+                <a16:creationId xmlns:a16="http://schemas.microsoft.com/office/drawing/2014/main" id="{7B2D6C2A-CFB2-BCBD-DEDA-F373BC89858F}"/>
               </a:ext>
             </a:extLst>
           </p:cNvPr>
@@ -4899,7 +4899,7 @@
           <p:cNvPr id="5" name="テキスト ボックス 4">
             <a:extLst>
               <a:ext uri="{FF2B5EF4-FFF2-40B4-BE49-F238E27FC236}">
-                <a16:creationId xmlns:a16="http://schemas.microsoft.com/office/drawing/2014/main" id="{0AEE4C62-6E69-4CCF-1657-5A1A6BB8F65F}"/>
+                <a16:creationId xmlns:a16="http://schemas.microsoft.com/office/drawing/2014/main" id="{D80C71BC-9B6A-12E1-A5CE-ADDB34C333A7}"/>
               </a:ext>
             </a:extLst>
           </p:cNvPr>
@@ -4946,7 +4946,7 @@
             <a:hlinkClick r:id="" action="ppaction://media"/>
             <a:extLst>
               <a:ext uri="{FF2B5EF4-FFF2-40B4-BE49-F238E27FC236}">
-                <a16:creationId xmlns:a16="http://schemas.microsoft.com/office/drawing/2014/main" id="{1FD5EEFB-4C49-8A64-195C-6C50A40E020B}"/>
+                <a16:creationId xmlns:a16="http://schemas.microsoft.com/office/drawing/2014/main" id="{D5C340B3-E1CE-774B-E517-042B1539DE17}"/>
               </a:ext>
             </a:extLst>
           </p:cNvPr>
@@ -4981,7 +4981,7 @@
     </p:spTree>
     <p:extLst>
       <p:ext uri="{BB962C8B-B14F-4D97-AF65-F5344CB8AC3E}">
-        <p14:creationId xmlns:p14="http://schemas.microsoft.com/office/powerpoint/2010/main" val="987829966"/>
+        <p14:creationId xmlns:p14="http://schemas.microsoft.com/office/powerpoint/2010/main" val="3791719543"/>
       </p:ext>
     </p:extLst>
   </p:cSld>
@@ -5105,7 +5105,7 @@
           <p:cNvPr id="2" name="テキスト ボックス 1">
             <a:extLst>
               <a:ext uri="{FF2B5EF4-FFF2-40B4-BE49-F238E27FC236}">
-                <a16:creationId xmlns:a16="http://schemas.microsoft.com/office/drawing/2014/main" id="{C92305E3-E641-1352-9921-5E220986937C}"/>
+                <a16:creationId xmlns:a16="http://schemas.microsoft.com/office/drawing/2014/main" id="{D9025055-8779-7193-37A3-2DC6A097BE3B}"/>
               </a:ext>
             </a:extLst>
           </p:cNvPr>
@@ -5151,7 +5151,7 @@
           <p:cNvPr id="3" name="テキスト ボックス 2">
             <a:extLst>
               <a:ext uri="{FF2B5EF4-FFF2-40B4-BE49-F238E27FC236}">
-                <a16:creationId xmlns:a16="http://schemas.microsoft.com/office/drawing/2014/main" id="{B194D201-3D1D-FEC5-A2C6-ED1138600112}"/>
+                <a16:creationId xmlns:a16="http://schemas.microsoft.com/office/drawing/2014/main" id="{A17DA39D-9C7F-E0FA-DFFC-688792B51427}"/>
               </a:ext>
             </a:extLst>
           </p:cNvPr>
@@ -5191,7 +5191,7 @@
           <p:cNvPr id="4" name="テキスト ボックス 3">
             <a:extLst>
               <a:ext uri="{FF2B5EF4-FFF2-40B4-BE49-F238E27FC236}">
-                <a16:creationId xmlns:a16="http://schemas.microsoft.com/office/drawing/2014/main" id="{85197993-BF31-DE37-C307-D79FCCD21C1F}"/>
+                <a16:creationId xmlns:a16="http://schemas.microsoft.com/office/drawing/2014/main" id="{C0EC3CB0-6B3A-1D5C-6FA4-EA0F088CC015}"/>
               </a:ext>
             </a:extLst>
           </p:cNvPr>
@@ -5215,20 +5215,14 @@
           <a:lstStyle/>
           <a:p>
             <a:r>
-              <a:rPr kumimoji="1" lang="en-US" altLang="ja-JP" sz="2000">
+              <a:rPr kumimoji="1" lang="ja-JP" altLang="en-US" sz="2000">
                 <a:solidFill>
                   <a:srgbClr val="333333"/>
                 </a:solidFill>
                 <a:latin typeface="Arial" panose="020B0604020202020204" pitchFamily="34" charset="0"/>
               </a:rPr>
-              <a:t>Set confirmed custom domain</a:t>
-            </a:r>
-            <a:endParaRPr kumimoji="1" lang="ja-JP" altLang="en-US" sz="2000">
-              <a:solidFill>
-                <a:srgbClr val="333333"/>
-              </a:solidFill>
-              <a:latin typeface="Arial" panose="020B0604020202020204" pitchFamily="34" charset="0"/>
-            </a:endParaRPr>
+              <a:t>直近のコミットでは、実装の見直しと継続的な改善が行われました。</a:t>
+            </a:r>
           </a:p>
         </p:txBody>
       </p:sp>
@@ -5237,7 +5231,7 @@
           <p:cNvPr id="5" name="テキスト ボックス 4">
             <a:extLst>
               <a:ext uri="{FF2B5EF4-FFF2-40B4-BE49-F238E27FC236}">
-                <a16:creationId xmlns:a16="http://schemas.microsoft.com/office/drawing/2014/main" id="{3978E019-4675-B613-121F-439C62FF57D0}"/>
+                <a16:creationId xmlns:a16="http://schemas.microsoft.com/office/drawing/2014/main" id="{45074DF9-D4C4-C8A0-B24E-9CAC00F2CB22}"/>
               </a:ext>
             </a:extLst>
           </p:cNvPr>
@@ -5284,7 +5278,7 @@
             <a:hlinkClick r:id="" action="ppaction://media"/>
             <a:extLst>
               <a:ext uri="{FF2B5EF4-FFF2-40B4-BE49-F238E27FC236}">
-                <a16:creationId xmlns:a16="http://schemas.microsoft.com/office/drawing/2014/main" id="{134E83B3-2D7C-686D-D2D8-B945BC48B44B}"/>
+                <a16:creationId xmlns:a16="http://schemas.microsoft.com/office/drawing/2014/main" id="{93CF019F-0213-3E91-2E36-56D1FF8F324D}"/>
               </a:ext>
             </a:extLst>
           </p:cNvPr>
@@ -5319,7 +5313,7 @@
     </p:spTree>
     <p:extLst>
       <p:ext uri="{BB962C8B-B14F-4D97-AF65-F5344CB8AC3E}">
-        <p14:creationId xmlns:p14="http://schemas.microsoft.com/office/powerpoint/2010/main" val="1866004505"/>
+        <p14:creationId xmlns:p14="http://schemas.microsoft.com/office/powerpoint/2010/main" val="1515569349"/>
       </p:ext>
     </p:extLst>
   </p:cSld>
@@ -5362,7 +5356,7 @@
                                   <p:childTnLst>
                                     <p:cmd type="call" cmd="playFrom(0.0)">
                                       <p:cBhvr>
-                                        <p:cTn id="6" dur="6451" fill="hold"/>
+                                        <p:cTn id="6" dur="6076" fill="hold"/>
                                         <p:tgtEl>
                                           <p:spTgt spid="6"/>
                                         </p:tgtEl>
@@ -5443,7 +5437,7 @@
           <p:cNvPr id="2" name="テキスト ボックス 1">
             <a:extLst>
               <a:ext uri="{FF2B5EF4-FFF2-40B4-BE49-F238E27FC236}">
-                <a16:creationId xmlns:a16="http://schemas.microsoft.com/office/drawing/2014/main" id="{B08EE055-F915-B20C-EAEC-7FACA8B3B536}"/>
+                <a16:creationId xmlns:a16="http://schemas.microsoft.com/office/drawing/2014/main" id="{776CF72A-128B-196E-4A48-C7EFA0329952}"/>
               </a:ext>
             </a:extLst>
           </p:cNvPr>
@@ -5489,7 +5483,7 @@
           <p:cNvPr id="3" name="テキスト ボックス 2">
             <a:extLst>
               <a:ext uri="{FF2B5EF4-FFF2-40B4-BE49-F238E27FC236}">
-                <a16:creationId xmlns:a16="http://schemas.microsoft.com/office/drawing/2014/main" id="{21F55A7C-2EEC-397F-1F26-C2E15063F793}"/>
+                <a16:creationId xmlns:a16="http://schemas.microsoft.com/office/drawing/2014/main" id="{E513A5E8-0031-B146-82DA-23863A3EB867}"/>
               </a:ext>
             </a:extLst>
           </p:cNvPr>
@@ -5529,7 +5523,7 @@
           <p:cNvPr id="4" name="テキスト ボックス 3">
             <a:extLst>
               <a:ext uri="{FF2B5EF4-FFF2-40B4-BE49-F238E27FC236}">
-                <a16:creationId xmlns:a16="http://schemas.microsoft.com/office/drawing/2014/main" id="{AD3C15E6-3ED1-BE94-E50D-BF232F881E0F}"/>
+                <a16:creationId xmlns:a16="http://schemas.microsoft.com/office/drawing/2014/main" id="{65F0D1C6-F80D-E6E8-615A-04E7659CE426}"/>
               </a:ext>
             </a:extLst>
           </p:cNvPr>
@@ -5594,7 +5588,7 @@
           <p:cNvPr id="5" name="テキスト ボックス 4">
             <a:extLst>
               <a:ext uri="{FF2B5EF4-FFF2-40B4-BE49-F238E27FC236}">
-                <a16:creationId xmlns:a16="http://schemas.microsoft.com/office/drawing/2014/main" id="{06D24AE5-9F28-AC1C-3F01-C1EC1D9E8267}"/>
+                <a16:creationId xmlns:a16="http://schemas.microsoft.com/office/drawing/2014/main" id="{4DCF2BA5-BAD0-EE3A-2546-F724F338DE7F}"/>
               </a:ext>
             </a:extLst>
           </p:cNvPr>
@@ -5641,7 +5635,7 @@
             <a:hlinkClick r:id="" action="ppaction://media"/>
             <a:extLst>
               <a:ext uri="{FF2B5EF4-FFF2-40B4-BE49-F238E27FC236}">
-                <a16:creationId xmlns:a16="http://schemas.microsoft.com/office/drawing/2014/main" id="{6A724F95-971E-FCE2-D630-9AF82481D1E7}"/>
+                <a16:creationId xmlns:a16="http://schemas.microsoft.com/office/drawing/2014/main" id="{3FF6E932-9C11-2D33-3761-4A280DCCAF45}"/>
               </a:ext>
             </a:extLst>
           </p:cNvPr>
@@ -5676,7 +5670,7 @@
     </p:spTree>
     <p:extLst>
       <p:ext uri="{BB962C8B-B14F-4D97-AF65-F5344CB8AC3E}">
-        <p14:creationId xmlns:p14="http://schemas.microsoft.com/office/powerpoint/2010/main" val="238773405"/>
+        <p14:creationId xmlns:p14="http://schemas.microsoft.com/office/powerpoint/2010/main" val="648220963"/>
       </p:ext>
     </p:extLst>
   </p:cSld>
